--- a/AgenticAI/6-hands-on/project_email_agent_customer_support_langchain_langgraph/notes.pptx
+++ b/AgenticAI/6-hands-on/project_email_agent_customer_support_langchain_langgraph/notes.pptx
@@ -14,7 +14,7 @@
     <p:sldId id="257" r:id="rId2"/>
     <p:sldId id="275" r:id="rId3"/>
     <p:sldId id="276" r:id="rId4"/>
-    <p:sldId id="278" r:id="rId5"/>
+    <p:sldId id="286" r:id="rId5"/>
     <p:sldId id="277" r:id="rId6"/>
   </p:sldIdLst>
   <p:sldSz cx="12192000" cy="6858000"/>
@@ -219,7 +219,7 @@
           <a:p>
             <a:fld id="{7BAEECA8-D063-486F-AE31-5020270C1449}" type="datetimeFigureOut">
               <a:rPr lang="en-US" smtClean="0"/>
-              <a:t>6/18/2026</a:t>
+              <a:t>9/23/2026</a:t>
             </a:fld>
             <a:endParaRPr lang="en-US"/>
           </a:p>
@@ -396,7 +396,7 @@
           <a:p>
             <a:fld id="{CB233BD1-3BA8-448D-9D08-7846095EA517}" type="datetimeFigureOut">
               <a:rPr lang="en-US" smtClean="0"/>
-              <a:t>6/18/2026</a:t>
+              <a:t>9/23/2026</a:t>
             </a:fld>
             <a:endParaRPr lang="en-US"/>
           </a:p>
@@ -810,7 +810,7 @@
           <a:p>
             <a:fld id="{6383FAE1-13DE-4511-8C1B-C8AFB720664C}" type="datetimeFigureOut">
               <a:rPr lang="en-US" smtClean="0"/>
-              <a:t>6/18/2026</a:t>
+              <a:t>9/23/2026</a:t>
             </a:fld>
             <a:endParaRPr lang="en-US"/>
           </a:p>
@@ -1008,7 +1008,7 @@
           <a:p>
             <a:fld id="{6383FAE1-13DE-4511-8C1B-C8AFB720664C}" type="datetimeFigureOut">
               <a:rPr lang="en-US" smtClean="0"/>
-              <a:t>6/18/2026</a:t>
+              <a:t>9/23/2026</a:t>
             </a:fld>
             <a:endParaRPr lang="en-US"/>
           </a:p>
@@ -1216,7 +1216,7 @@
           <a:p>
             <a:fld id="{6383FAE1-13DE-4511-8C1B-C8AFB720664C}" type="datetimeFigureOut">
               <a:rPr lang="en-US" smtClean="0"/>
-              <a:t>6/18/2026</a:t>
+              <a:t>9/23/2026</a:t>
             </a:fld>
             <a:endParaRPr lang="en-US"/>
           </a:p>
@@ -1414,7 +1414,7 @@
           <a:p>
             <a:fld id="{6383FAE1-13DE-4511-8C1B-C8AFB720664C}" type="datetimeFigureOut">
               <a:rPr lang="en-US" smtClean="0"/>
-              <a:t>6/18/2026</a:t>
+              <a:t>9/23/2026</a:t>
             </a:fld>
             <a:endParaRPr lang="en-US"/>
           </a:p>
@@ -1689,7 +1689,7 @@
           <a:p>
             <a:fld id="{6383FAE1-13DE-4511-8C1B-C8AFB720664C}" type="datetimeFigureOut">
               <a:rPr lang="en-US" smtClean="0"/>
-              <a:t>6/18/2026</a:t>
+              <a:t>9/23/2026</a:t>
             </a:fld>
             <a:endParaRPr lang="en-US"/>
           </a:p>
@@ -1954,7 +1954,7 @@
           <a:p>
             <a:fld id="{6383FAE1-13DE-4511-8C1B-C8AFB720664C}" type="datetimeFigureOut">
               <a:rPr lang="en-US" smtClean="0"/>
-              <a:t>6/18/2026</a:t>
+              <a:t>9/23/2026</a:t>
             </a:fld>
             <a:endParaRPr lang="en-US"/>
           </a:p>
@@ -2366,7 +2366,7 @@
           <a:p>
             <a:fld id="{6383FAE1-13DE-4511-8C1B-C8AFB720664C}" type="datetimeFigureOut">
               <a:rPr lang="en-US" smtClean="0"/>
-              <a:t>6/18/2026</a:t>
+              <a:t>9/23/2026</a:t>
             </a:fld>
             <a:endParaRPr lang="en-US"/>
           </a:p>
@@ -2507,7 +2507,7 @@
           <a:p>
             <a:fld id="{6383FAE1-13DE-4511-8C1B-C8AFB720664C}" type="datetimeFigureOut">
               <a:rPr lang="en-US" smtClean="0"/>
-              <a:t>6/18/2026</a:t>
+              <a:t>9/23/2026</a:t>
             </a:fld>
             <a:endParaRPr lang="en-US"/>
           </a:p>
@@ -2620,7 +2620,7 @@
           <a:p>
             <a:fld id="{6383FAE1-13DE-4511-8C1B-C8AFB720664C}" type="datetimeFigureOut">
               <a:rPr lang="en-US" smtClean="0"/>
-              <a:t>6/18/2026</a:t>
+              <a:t>9/23/2026</a:t>
             </a:fld>
             <a:endParaRPr lang="en-US"/>
           </a:p>
@@ -2931,7 +2931,7 @@
           <a:p>
             <a:fld id="{6383FAE1-13DE-4511-8C1B-C8AFB720664C}" type="datetimeFigureOut">
               <a:rPr lang="en-US" smtClean="0"/>
-              <a:t>6/18/2026</a:t>
+              <a:t>9/23/2026</a:t>
             </a:fld>
             <a:endParaRPr lang="en-US"/>
           </a:p>
@@ -3222,7 +3222,7 @@
           <a:p>
             <a:fld id="{6383FAE1-13DE-4511-8C1B-C8AFB720664C}" type="datetimeFigureOut">
               <a:rPr lang="en-US" smtClean="0"/>
-              <a:t>6/18/2026</a:t>
+              <a:t>9/23/2026</a:t>
             </a:fld>
             <a:endParaRPr lang="en-US"/>
           </a:p>
@@ -3466,7 +3466,7 @@
           <a:p>
             <a:fld id="{6383FAE1-13DE-4511-8C1B-C8AFB720664C}" type="datetimeFigureOut">
               <a:rPr lang="en-US" smtClean="0"/>
-              <a:t>6/18/2026</a:t>
+              <a:t>9/23/2026</a:t>
             </a:fld>
             <a:endParaRPr lang="en-US"/>
           </a:p>
@@ -4331,10 +4331,261 @@
           <a:chExt cx="0" cy="0"/>
         </a:xfrm>
       </p:grpSpPr>
+      <p:sp>
+        <p:nvSpPr>
+          <p:cNvPr id="2" name="TextBox 1">
+            <a:extLst>
+              <a:ext uri="{FF2B5EF4-FFF2-40B4-BE49-F238E27FC236}">
+                <a16:creationId xmlns:a16="http://schemas.microsoft.com/office/drawing/2014/main" id="{4A321DA7-B6A8-988D-D4AC-32BF34C96E94}"/>
+              </a:ext>
+            </a:extLst>
+          </p:cNvPr>
+          <p:cNvSpPr txBox="1"/>
+          <p:nvPr/>
+        </p:nvSpPr>
+        <p:spPr>
+          <a:xfrm>
+            <a:off x="738792" y="675549"/>
+            <a:ext cx="4473917" cy="369332"/>
+          </a:xfrm>
+          <a:prstGeom prst="rect">
+            <a:avLst/>
+          </a:prstGeom>
+          <a:noFill/>
+        </p:spPr>
+        <p:txBody>
+          <a:bodyPr wrap="none" rtlCol="0">
+            <a:spAutoFit/>
+          </a:bodyPr>
+          <a:lstStyle/>
+          <a:p>
+            <a:r>
+              <a:rPr lang="en-US" dirty="0">
+                <a:solidFill>
+                  <a:schemeClr val="accent6">
+                    <a:lumMod val="60000"/>
+                    <a:lumOff val="40000"/>
+                  </a:schemeClr>
+                </a:solidFill>
+              </a:rPr>
+              <a:t>An example of Agent from real life experience</a:t>
+            </a:r>
+            <a:endParaRPr lang="en-IN" dirty="0">
+              <a:solidFill>
+                <a:schemeClr val="accent6">
+                  <a:lumMod val="60000"/>
+                  <a:lumOff val="40000"/>
+                </a:schemeClr>
+              </a:solidFill>
+            </a:endParaRPr>
+          </a:p>
+        </p:txBody>
+      </p:sp>
+      <p:pic>
+        <p:nvPicPr>
+          <p:cNvPr id="4" name="Picture 3">
+            <a:extLst>
+              <a:ext uri="{FF2B5EF4-FFF2-40B4-BE49-F238E27FC236}">
+                <a16:creationId xmlns:a16="http://schemas.microsoft.com/office/drawing/2014/main" id="{59FE592C-B16B-3B23-8A5C-B4EFF4B2F970}"/>
+              </a:ext>
+            </a:extLst>
+          </p:cNvPr>
+          <p:cNvPicPr>
+            <a:picLocks noChangeAspect="1"/>
+          </p:cNvPicPr>
+          <p:nvPr/>
+        </p:nvPicPr>
+        <p:blipFill>
+          <a:blip r:embed="rId2"/>
+          <a:stretch>
+            <a:fillRect/>
+          </a:stretch>
+        </p:blipFill>
+        <p:spPr>
+          <a:xfrm>
+            <a:off x="423131" y="1232405"/>
+            <a:ext cx="4917890" cy="5291195"/>
+          </a:xfrm>
+          <a:prstGeom prst="rect">
+            <a:avLst/>
+          </a:prstGeom>
+        </p:spPr>
+      </p:pic>
+      <p:pic>
+        <p:nvPicPr>
+          <p:cNvPr id="7" name="Picture 6">
+            <a:extLst>
+              <a:ext uri="{FF2B5EF4-FFF2-40B4-BE49-F238E27FC236}">
+                <a16:creationId xmlns:a16="http://schemas.microsoft.com/office/drawing/2014/main" id="{BEB9279A-2CE9-A0E4-EC7F-BEB2663B5369}"/>
+              </a:ext>
+            </a:extLst>
+          </p:cNvPr>
+          <p:cNvPicPr>
+            <a:picLocks noChangeAspect="1"/>
+          </p:cNvPicPr>
+          <p:nvPr/>
+        </p:nvPicPr>
+        <p:blipFill>
+          <a:blip r:embed="rId3"/>
+          <a:stretch>
+            <a:fillRect/>
+          </a:stretch>
+        </p:blipFill>
+        <p:spPr>
+          <a:xfrm>
+            <a:off x="6887909" y="1627632"/>
+            <a:ext cx="5221795" cy="4895968"/>
+          </a:xfrm>
+          <a:prstGeom prst="rect">
+            <a:avLst/>
+          </a:prstGeom>
+        </p:spPr>
+      </p:pic>
+      <p:sp>
+        <p:nvSpPr>
+          <p:cNvPr id="8" name="Arrow: Right 7">
+            <a:extLst>
+              <a:ext uri="{FF2B5EF4-FFF2-40B4-BE49-F238E27FC236}">
+                <a16:creationId xmlns:a16="http://schemas.microsoft.com/office/drawing/2014/main" id="{2B7FCA7A-32A4-D0D7-582B-1B71C6751120}"/>
+              </a:ext>
+            </a:extLst>
+          </p:cNvPr>
+          <p:cNvSpPr/>
+          <p:nvPr/>
+        </p:nvSpPr>
+        <p:spPr>
+          <a:xfrm>
+            <a:off x="5695826" y="3191256"/>
+            <a:ext cx="867757" cy="475488"/>
+          </a:xfrm>
+          <a:prstGeom prst="rightArrow">
+            <a:avLst/>
+          </a:prstGeom>
+        </p:spPr>
+        <p:style>
+          <a:lnRef idx="2">
+            <a:schemeClr val="accent1">
+              <a:shade val="15000"/>
+            </a:schemeClr>
+          </a:lnRef>
+          <a:fillRef idx="1">
+            <a:schemeClr val="accent1"/>
+          </a:fillRef>
+          <a:effectRef idx="0">
+            <a:schemeClr val="accent1"/>
+          </a:effectRef>
+          <a:fontRef idx="minor">
+            <a:schemeClr val="lt1"/>
+          </a:fontRef>
+        </p:style>
+        <p:txBody>
+          <a:bodyPr rtlCol="0" anchor="ctr"/>
+          <a:lstStyle/>
+          <a:p>
+            <a:pPr algn="ctr"/>
+            <a:endParaRPr lang="en-IN"/>
+          </a:p>
+        </p:txBody>
+      </p:sp>
+      <p:sp>
+        <p:nvSpPr>
+          <p:cNvPr id="5" name="TextBox 4">
+            <a:extLst>
+              <a:ext uri="{FF2B5EF4-FFF2-40B4-BE49-F238E27FC236}">
+                <a16:creationId xmlns:a16="http://schemas.microsoft.com/office/drawing/2014/main" id="{892399D7-59D1-0281-0E85-6AF97B36C2A4}"/>
+              </a:ext>
+            </a:extLst>
+          </p:cNvPr>
+          <p:cNvSpPr txBox="1"/>
+          <p:nvPr/>
+        </p:nvSpPr>
+        <p:spPr>
+          <a:xfrm>
+            <a:off x="6718854" y="791742"/>
+            <a:ext cx="5129033" cy="646331"/>
+          </a:xfrm>
+          <a:prstGeom prst="rect">
+            <a:avLst/>
+          </a:prstGeom>
+          <a:noFill/>
+        </p:spPr>
+        <p:txBody>
+          <a:bodyPr wrap="none" rtlCol="0">
+            <a:spAutoFit/>
+          </a:bodyPr>
+          <a:lstStyle/>
+          <a:p>
+            <a:r>
+              <a:rPr lang="en-US" dirty="0">
+                <a:solidFill>
+                  <a:schemeClr val="accent6">
+                    <a:lumMod val="60000"/>
+                    <a:lumOff val="40000"/>
+                  </a:schemeClr>
+                </a:solidFill>
+              </a:rPr>
+              <a:t>Based on type of email, Agent forwards the</a:t>
+            </a:r>
+          </a:p>
+          <a:p>
+            <a:r>
+              <a:rPr lang="en-US" dirty="0">
+                <a:solidFill>
+                  <a:schemeClr val="accent6">
+                    <a:lumMod val="60000"/>
+                    <a:lumOff val="40000"/>
+                  </a:schemeClr>
+                </a:solidFill>
+              </a:rPr>
+              <a:t>Email to Support, Refund, Accounts, etc. department</a:t>
+            </a:r>
+            <a:endParaRPr lang="en-IN" dirty="0">
+              <a:solidFill>
+                <a:schemeClr val="accent6">
+                  <a:lumMod val="60000"/>
+                  <a:lumOff val="40000"/>
+                </a:schemeClr>
+              </a:solidFill>
+            </a:endParaRPr>
+          </a:p>
+        </p:txBody>
+      </p:sp>
+      <p:sp>
+        <p:nvSpPr>
+          <p:cNvPr id="3" name="TextBox 2">
+            <a:extLst>
+              <a:ext uri="{FF2B5EF4-FFF2-40B4-BE49-F238E27FC236}">
+                <a16:creationId xmlns:a16="http://schemas.microsoft.com/office/drawing/2014/main" id="{75193301-0902-C83C-E7F0-4D371D047D3C}"/>
+              </a:ext>
+            </a:extLst>
+          </p:cNvPr>
+          <p:cNvSpPr txBox="1"/>
+          <p:nvPr/>
+        </p:nvSpPr>
+        <p:spPr>
+          <a:xfrm>
+            <a:off x="5998464" y="905256"/>
+            <a:ext cx="184731" cy="369332"/>
+          </a:xfrm>
+          <a:prstGeom prst="rect">
+            <a:avLst/>
+          </a:prstGeom>
+          <a:noFill/>
+        </p:spPr>
+        <p:txBody>
+          <a:bodyPr wrap="none" rtlCol="0">
+            <a:spAutoFit/>
+          </a:bodyPr>
+          <a:lstStyle/>
+          <a:p>
+            <a:endParaRPr lang="en-IN"/>
+          </a:p>
+        </p:txBody>
+      </p:sp>
     </p:spTree>
     <p:extLst>
       <p:ext uri="{BB962C8B-B14F-4D97-AF65-F5344CB8AC3E}">
-        <p14:creationId xmlns:p14="http://schemas.microsoft.com/office/powerpoint/2010/main" val="2201931908"/>
+        <p14:creationId xmlns:p14="http://schemas.microsoft.com/office/powerpoint/2010/main" val="812261249"/>
       </p:ext>
     </p:extLst>
   </p:cSld>
